--- a/dx_success_metrics.pptx
+++ b/dx_success_metrics.pptx
@@ -13,6 +13,7 @@
     <p:sldId id="261" r:id="rId12"/>
     <p:sldId id="262" r:id="rId13"/>
     <p:sldId id="263" r:id="rId14"/>
+    <p:sldId id="264" r:id="rId15"/>
   </p:sldIdLst>
   <p:sldSz cx="12191695" cy="6858000" type="screen4x3"/>
   <p:notesSz cx="6858000" cy="9144000"/>
@@ -11152,6 +11153,1360 @@
 </file>
 
 <file path=ppt/slides/slide8.xml><?xml version="1.0" encoding="utf-8"?>
+<p:sld xmlns:a="http://schemas.openxmlformats.org/drawingml/2006/main" xmlns:p="http://schemas.openxmlformats.org/presentationml/2006/main" xmlns:r="http://schemas.openxmlformats.org/officeDocument/2006/relationships">
+  <p:cSld>
+    <p:bg>
+      <p:bgPr>
+        <a:solidFill>
+          <a:srgbClr val="1A1A2E"/>
+        </a:solidFill>
+        <a:effectLst/>
+      </p:bgPr>
+    </p:bg>
+    <p:spTree>
+      <p:nvGrpSpPr>
+        <p:cNvPr id="1" name=""/>
+        <p:cNvGrpSpPr/>
+        <p:nvPr/>
+      </p:nvGrpSpPr>
+      <p:grpSpPr/>
+      <p:sp>
+        <p:nvSpPr>
+          <p:cNvPr id="2" name="Rectangle 1"/>
+          <p:cNvSpPr/>
+          <p:nvPr/>
+        </p:nvSpPr>
+        <p:spPr>
+          <a:xfrm>
+            <a:off x="0" y="0"/>
+            <a:ext cx="12191695" cy="50800"/>
+          </a:xfrm>
+          <a:prstGeom prst="rect">
+            <a:avLst/>
+          </a:prstGeom>
+          <a:solidFill>
+            <a:srgbClr val="EF4444"/>
+          </a:solidFill>
+          <a:ln>
+            <a:noFill/>
+          </a:ln>
+        </p:spPr>
+        <p:style>
+          <a:lnRef idx="1">
+            <a:schemeClr val="accent1"/>
+          </a:lnRef>
+          <a:fillRef idx="3">
+            <a:schemeClr val="accent1"/>
+          </a:fillRef>
+          <a:effectRef idx="2">
+            <a:schemeClr val="accent1"/>
+          </a:effectRef>
+          <a:fontRef idx="minor">
+            <a:schemeClr val="lt1"/>
+          </a:fontRef>
+        </p:style>
+        <p:txBody>
+          <a:bodyPr rtlCol="0" anchor="ctr"/>
+          <a:lstStyle/>
+          <a:p>
+            <a:pPr algn="ctr"/>
+          </a:p>
+        </p:txBody>
+      </p:sp>
+      <p:sp>
+        <p:nvSpPr>
+          <p:cNvPr id="3" name="TextBox 2"/>
+          <p:cNvSpPr txBox="1"/>
+          <p:nvPr/>
+        </p:nvSpPr>
+        <p:spPr>
+          <a:xfrm>
+            <a:off x="731520" y="365760"/>
+            <a:ext cx="9144000" cy="731520"/>
+          </a:xfrm>
+          <a:prstGeom prst="rect">
+            <a:avLst/>
+          </a:prstGeom>
+          <a:noFill/>
+        </p:spPr>
+        <p:txBody>
+          <a:bodyPr wrap="square">
+            <a:spAutoFit/>
+          </a:bodyPr>
+          <a:lstStyle/>
+          <a:p>
+            <a:pPr algn="l">
+              <a:defRPr sz="3400" b="1">
+                <a:solidFill>
+                  <a:srgbClr val="FFFFFF"/>
+                </a:solidFill>
+                <a:latin typeface="Meiryo"/>
+              </a:defRPr>
+            </a:pPr>
+            <a:r>
+              <a:t>管理会計の落とし穴 ― ダッシュボードは見られない</a:t>
+            </a:r>
+          </a:p>
+        </p:txBody>
+      </p:sp>
+      <p:sp>
+        <p:nvSpPr>
+          <p:cNvPr id="4" name="TextBox 3"/>
+          <p:cNvSpPr txBox="1"/>
+          <p:nvPr/>
+        </p:nvSpPr>
+        <p:spPr>
+          <a:xfrm>
+            <a:off x="731520" y="1097280"/>
+            <a:ext cx="10058400" cy="457200"/>
+          </a:xfrm>
+          <a:prstGeom prst="rect">
+            <a:avLst/>
+          </a:prstGeom>
+          <a:noFill/>
+        </p:spPr>
+        <p:txBody>
+          <a:bodyPr wrap="square">
+            <a:spAutoFit/>
+          </a:bodyPr>
+          <a:lstStyle/>
+          <a:p>
+            <a:pPr algn="l">
+              <a:defRPr sz="1600" b="0">
+                <a:solidFill>
+                  <a:srgbClr val="48CAE4"/>
+                </a:solidFill>
+                <a:latin typeface="Meiryo"/>
+              </a:defRPr>
+            </a:pPr>
+            <a:r>
+              <a:t>分析するのは経営企画の一部だけ。ダッシュボードを作っても、自発的に見る人はほぼいない。</a:t>
+            </a:r>
+          </a:p>
+        </p:txBody>
+      </p:sp>
+      <p:sp>
+        <p:nvSpPr>
+          <p:cNvPr id="5" name="Rounded Rectangle 4"/>
+          <p:cNvSpPr/>
+          <p:nvPr/>
+        </p:nvSpPr>
+        <p:spPr>
+          <a:xfrm>
+            <a:off x="731520" y="1828800"/>
+            <a:ext cx="5303520" cy="4114800"/>
+          </a:xfrm>
+          <a:prstGeom prst="roundRect">
+            <a:avLst>
+              <a:gd name="adj" fmla="val 4000"/>
+            </a:avLst>
+          </a:prstGeom>
+          <a:solidFill>
+            <a:srgbClr val="2E1A1A"/>
+          </a:solidFill>
+          <a:ln>
+            <a:noFill/>
+          </a:ln>
+        </p:spPr>
+        <p:style>
+          <a:lnRef idx="1">
+            <a:schemeClr val="accent1"/>
+          </a:lnRef>
+          <a:fillRef idx="3">
+            <a:schemeClr val="accent1"/>
+          </a:fillRef>
+          <a:effectRef idx="2">
+            <a:schemeClr val="accent1"/>
+          </a:effectRef>
+          <a:fontRef idx="minor">
+            <a:schemeClr val="lt1"/>
+          </a:fontRef>
+        </p:style>
+        <p:txBody>
+          <a:bodyPr rtlCol="0" anchor="ctr"/>
+          <a:lstStyle/>
+          <a:p>
+            <a:pPr algn="ctr"/>
+          </a:p>
+        </p:txBody>
+      </p:sp>
+      <p:sp>
+        <p:nvSpPr>
+          <p:cNvPr id="6" name="Rounded Rectangle 5"/>
+          <p:cNvSpPr/>
+          <p:nvPr/>
+        </p:nvSpPr>
+        <p:spPr>
+          <a:xfrm>
+            <a:off x="731520" y="1828800"/>
+            <a:ext cx="5303520" cy="76200"/>
+          </a:xfrm>
+          <a:prstGeom prst="roundRect">
+            <a:avLst>
+              <a:gd name="adj" fmla="val 0"/>
+            </a:avLst>
+          </a:prstGeom>
+          <a:solidFill>
+            <a:srgbClr val="EF4444"/>
+          </a:solidFill>
+          <a:ln>
+            <a:noFill/>
+          </a:ln>
+        </p:spPr>
+        <p:style>
+          <a:lnRef idx="1">
+            <a:schemeClr val="accent1"/>
+          </a:lnRef>
+          <a:fillRef idx="3">
+            <a:schemeClr val="accent1"/>
+          </a:fillRef>
+          <a:effectRef idx="2">
+            <a:schemeClr val="accent1"/>
+          </a:effectRef>
+          <a:fontRef idx="minor">
+            <a:schemeClr val="lt1"/>
+          </a:fontRef>
+        </p:style>
+        <p:txBody>
+          <a:bodyPr rtlCol="0" anchor="ctr"/>
+          <a:lstStyle/>
+          <a:p>
+            <a:pPr algn="ctr"/>
+          </a:p>
+        </p:txBody>
+      </p:sp>
+      <p:sp>
+        <p:nvSpPr>
+          <p:cNvPr id="7" name="TextBox 6"/>
+          <p:cNvSpPr txBox="1"/>
+          <p:nvPr/>
+        </p:nvSpPr>
+        <p:spPr>
+          <a:xfrm>
+            <a:off x="1097280" y="2103120"/>
+            <a:ext cx="4572000" cy="457200"/>
+          </a:xfrm>
+          <a:prstGeom prst="rect">
+            <a:avLst/>
+          </a:prstGeom>
+          <a:noFill/>
+        </p:spPr>
+        <p:txBody>
+          <a:bodyPr wrap="square">
+            <a:spAutoFit/>
+          </a:bodyPr>
+          <a:lstStyle/>
+          <a:p>
+            <a:pPr algn="l">
+              <a:defRPr sz="2400" b="1">
+                <a:solidFill>
+                  <a:srgbClr val="EF4444"/>
+                </a:solidFill>
+                <a:latin typeface="Meiryo"/>
+              </a:defRPr>
+            </a:pPr>
+            <a:r>
+              <a:t>ありがちな失敗パターン</a:t>
+            </a:r>
+          </a:p>
+        </p:txBody>
+      </p:sp>
+      <p:sp>
+        <p:nvSpPr>
+          <p:cNvPr id="8" name="TextBox 7"/>
+          <p:cNvSpPr txBox="1"/>
+          <p:nvPr/>
+        </p:nvSpPr>
+        <p:spPr>
+          <a:xfrm>
+            <a:off x="1097280" y="2743200"/>
+            <a:ext cx="365760" cy="365760"/>
+          </a:xfrm>
+          <a:prstGeom prst="rect">
+            <a:avLst/>
+          </a:prstGeom>
+          <a:noFill/>
+        </p:spPr>
+        <p:txBody>
+          <a:bodyPr wrap="square">
+            <a:spAutoFit/>
+          </a:bodyPr>
+          <a:lstStyle/>
+          <a:p>
+            <a:pPr algn="l">
+              <a:defRPr sz="1600" b="1">
+                <a:solidFill>
+                  <a:srgbClr val="EF4444"/>
+                </a:solidFill>
+                <a:latin typeface="Meiryo"/>
+              </a:defRPr>
+            </a:pPr>
+            <a:r>
+              <a:t>1</a:t>
+            </a:r>
+          </a:p>
+        </p:txBody>
+      </p:sp>
+      <p:sp>
+        <p:nvSpPr>
+          <p:cNvPr id="9" name="TextBox 8"/>
+          <p:cNvSpPr txBox="1"/>
+          <p:nvPr/>
+        </p:nvSpPr>
+        <p:spPr>
+          <a:xfrm>
+            <a:off x="1554480" y="2743200"/>
+            <a:ext cx="1828800" cy="365760"/>
+          </a:xfrm>
+          <a:prstGeom prst="rect">
+            <a:avLst/>
+          </a:prstGeom>
+          <a:noFill/>
+        </p:spPr>
+        <p:txBody>
+          <a:bodyPr wrap="square">
+            <a:spAutoFit/>
+          </a:bodyPr>
+          <a:lstStyle/>
+          <a:p>
+            <a:pPr algn="l">
+              <a:defRPr sz="1500" b="1">
+                <a:solidFill>
+                  <a:srgbClr val="F0F4F8"/>
+                </a:solidFill>
+                <a:latin typeface="Meiryo"/>
+              </a:defRPr>
+            </a:pPr>
+            <a:r>
+              <a:t>ダッシュボードを構築</a:t>
+            </a:r>
+          </a:p>
+        </p:txBody>
+      </p:sp>
+      <p:sp>
+        <p:nvSpPr>
+          <p:cNvPr id="10" name="TextBox 9"/>
+          <p:cNvSpPr txBox="1"/>
+          <p:nvPr/>
+        </p:nvSpPr>
+        <p:spPr>
+          <a:xfrm>
+            <a:off x="3474720" y="2743200"/>
+            <a:ext cx="2286000" cy="365760"/>
+          </a:xfrm>
+          <a:prstGeom prst="rect">
+            <a:avLst/>
+          </a:prstGeom>
+          <a:noFill/>
+        </p:spPr>
+        <p:txBody>
+          <a:bodyPr wrap="square">
+            <a:spAutoFit/>
+          </a:bodyPr>
+          <a:lstStyle/>
+          <a:p>
+            <a:pPr algn="l">
+              <a:defRPr sz="1300" b="0">
+                <a:solidFill>
+                  <a:srgbClr val="6B7280"/>
+                </a:solidFill>
+                <a:latin typeface="Meiryo"/>
+              </a:defRPr>
+            </a:pPr>
+            <a:r>
+              <a:t>BIツールで立派なダッシュボードを作成</a:t>
+            </a:r>
+          </a:p>
+        </p:txBody>
+      </p:sp>
+      <p:sp>
+        <p:nvSpPr>
+          <p:cNvPr id="11" name="TextBox 10"/>
+          <p:cNvSpPr txBox="1"/>
+          <p:nvPr/>
+        </p:nvSpPr>
+        <p:spPr>
+          <a:xfrm>
+            <a:off x="1097280" y="3520440"/>
+            <a:ext cx="365760" cy="365760"/>
+          </a:xfrm>
+          <a:prstGeom prst="rect">
+            <a:avLst/>
+          </a:prstGeom>
+          <a:noFill/>
+        </p:spPr>
+        <p:txBody>
+          <a:bodyPr wrap="square">
+            <a:spAutoFit/>
+          </a:bodyPr>
+          <a:lstStyle/>
+          <a:p>
+            <a:pPr algn="l">
+              <a:defRPr sz="1600" b="1">
+                <a:solidFill>
+                  <a:srgbClr val="EF4444"/>
+                </a:solidFill>
+                <a:latin typeface="Meiryo"/>
+              </a:defRPr>
+            </a:pPr>
+            <a:r>
+              <a:t>2</a:t>
+            </a:r>
+          </a:p>
+        </p:txBody>
+      </p:sp>
+      <p:sp>
+        <p:nvSpPr>
+          <p:cNvPr id="12" name="TextBox 11"/>
+          <p:cNvSpPr txBox="1"/>
+          <p:nvPr/>
+        </p:nvSpPr>
+        <p:spPr>
+          <a:xfrm>
+            <a:off x="1554480" y="3520440"/>
+            <a:ext cx="1828800" cy="365760"/>
+          </a:xfrm>
+          <a:prstGeom prst="rect">
+            <a:avLst/>
+          </a:prstGeom>
+          <a:noFill/>
+        </p:spPr>
+        <p:txBody>
+          <a:bodyPr wrap="square">
+            <a:spAutoFit/>
+          </a:bodyPr>
+          <a:lstStyle/>
+          <a:p>
+            <a:pPr algn="l">
+              <a:defRPr sz="1500" b="1">
+                <a:solidFill>
+                  <a:srgbClr val="F0F4F8"/>
+                </a:solidFill>
+                <a:latin typeface="Meiryo"/>
+              </a:defRPr>
+            </a:pPr>
+            <a:r>
+              <a:t>「いつでも見られます」</a:t>
+            </a:r>
+          </a:p>
+        </p:txBody>
+      </p:sp>
+      <p:sp>
+        <p:nvSpPr>
+          <p:cNvPr id="13" name="TextBox 12"/>
+          <p:cNvSpPr txBox="1"/>
+          <p:nvPr/>
+        </p:nvSpPr>
+        <p:spPr>
+          <a:xfrm>
+            <a:off x="3474720" y="3520440"/>
+            <a:ext cx="2286000" cy="365760"/>
+          </a:xfrm>
+          <a:prstGeom prst="rect">
+            <a:avLst/>
+          </a:prstGeom>
+          <a:noFill/>
+        </p:spPr>
+        <p:txBody>
+          <a:bodyPr wrap="square">
+            <a:spAutoFit/>
+          </a:bodyPr>
+          <a:lstStyle/>
+          <a:p>
+            <a:pPr algn="l">
+              <a:defRPr sz="1300" b="0">
+                <a:solidFill>
+                  <a:srgbClr val="6B7280"/>
+                </a:solidFill>
+                <a:latin typeface="Meiryo"/>
+              </a:defRPr>
+            </a:pPr>
+            <a:r>
+              <a:t>全社に公開して自主的な閲覧を期待</a:t>
+            </a:r>
+          </a:p>
+        </p:txBody>
+      </p:sp>
+      <p:sp>
+        <p:nvSpPr>
+          <p:cNvPr id="14" name="TextBox 13"/>
+          <p:cNvSpPr txBox="1"/>
+          <p:nvPr/>
+        </p:nvSpPr>
+        <p:spPr>
+          <a:xfrm>
+            <a:off x="1097280" y="4297680"/>
+            <a:ext cx="365760" cy="365760"/>
+          </a:xfrm>
+          <a:prstGeom prst="rect">
+            <a:avLst/>
+          </a:prstGeom>
+          <a:noFill/>
+        </p:spPr>
+        <p:txBody>
+          <a:bodyPr wrap="square">
+            <a:spAutoFit/>
+          </a:bodyPr>
+          <a:lstStyle/>
+          <a:p>
+            <a:pPr algn="l">
+              <a:defRPr sz="1600" b="1">
+                <a:solidFill>
+                  <a:srgbClr val="EF4444"/>
+                </a:solidFill>
+                <a:latin typeface="Meiryo"/>
+              </a:defRPr>
+            </a:pPr>
+            <a:r>
+              <a:t>3</a:t>
+            </a:r>
+          </a:p>
+        </p:txBody>
+      </p:sp>
+      <p:sp>
+        <p:nvSpPr>
+          <p:cNvPr id="15" name="TextBox 14"/>
+          <p:cNvSpPr txBox="1"/>
+          <p:nvPr/>
+        </p:nvSpPr>
+        <p:spPr>
+          <a:xfrm>
+            <a:off x="1554480" y="4297680"/>
+            <a:ext cx="1828800" cy="365760"/>
+          </a:xfrm>
+          <a:prstGeom prst="rect">
+            <a:avLst/>
+          </a:prstGeom>
+          <a:noFill/>
+        </p:spPr>
+        <p:txBody>
+          <a:bodyPr wrap="square">
+            <a:spAutoFit/>
+          </a:bodyPr>
+          <a:lstStyle/>
+          <a:p>
+            <a:pPr algn="l">
+              <a:defRPr sz="1500" b="1">
+                <a:solidFill>
+                  <a:srgbClr val="F0F4F8"/>
+                </a:solidFill>
+                <a:latin typeface="Meiryo"/>
+              </a:defRPr>
+            </a:pPr>
+            <a:r>
+              <a:t>誰も見ない</a:t>
+            </a:r>
+          </a:p>
+        </p:txBody>
+      </p:sp>
+      <p:sp>
+        <p:nvSpPr>
+          <p:cNvPr id="16" name="TextBox 15"/>
+          <p:cNvSpPr txBox="1"/>
+          <p:nvPr/>
+        </p:nvSpPr>
+        <p:spPr>
+          <a:xfrm>
+            <a:off x="3474720" y="4297680"/>
+            <a:ext cx="2286000" cy="365760"/>
+          </a:xfrm>
+          <a:prstGeom prst="rect">
+            <a:avLst/>
+          </a:prstGeom>
+          <a:noFill/>
+        </p:spPr>
+        <p:txBody>
+          <a:bodyPr wrap="square">
+            <a:spAutoFit/>
+          </a:bodyPr>
+          <a:lstStyle/>
+          <a:p>
+            <a:pPr algn="l">
+              <a:defRPr sz="1300" b="0">
+                <a:solidFill>
+                  <a:srgbClr val="6B7280"/>
+                </a:solidFill>
+                <a:latin typeface="Meiryo"/>
+              </a:defRPr>
+            </a:pPr>
+            <a:r>
+              <a:t>経営企画の一部以外、アクセスゼロ</a:t>
+            </a:r>
+          </a:p>
+        </p:txBody>
+      </p:sp>
+      <p:sp>
+        <p:nvSpPr>
+          <p:cNvPr id="17" name="TextBox 16"/>
+          <p:cNvSpPr txBox="1"/>
+          <p:nvPr/>
+        </p:nvSpPr>
+        <p:spPr>
+          <a:xfrm>
+            <a:off x="1097280" y="5074920"/>
+            <a:ext cx="365760" cy="365760"/>
+          </a:xfrm>
+          <a:prstGeom prst="rect">
+            <a:avLst/>
+          </a:prstGeom>
+          <a:noFill/>
+        </p:spPr>
+        <p:txBody>
+          <a:bodyPr wrap="square">
+            <a:spAutoFit/>
+          </a:bodyPr>
+          <a:lstStyle/>
+          <a:p>
+            <a:pPr algn="l">
+              <a:defRPr sz="1600" b="1">
+                <a:solidFill>
+                  <a:srgbClr val="EF4444"/>
+                </a:solidFill>
+                <a:latin typeface="Meiryo"/>
+              </a:defRPr>
+            </a:pPr>
+            <a:r>
+              <a:t>4</a:t>
+            </a:r>
+          </a:p>
+        </p:txBody>
+      </p:sp>
+      <p:sp>
+        <p:nvSpPr>
+          <p:cNvPr id="18" name="TextBox 17"/>
+          <p:cNvSpPr txBox="1"/>
+          <p:nvPr/>
+        </p:nvSpPr>
+        <p:spPr>
+          <a:xfrm>
+            <a:off x="1554480" y="5074920"/>
+            <a:ext cx="1828800" cy="365760"/>
+          </a:xfrm>
+          <a:prstGeom prst="rect">
+            <a:avLst/>
+          </a:prstGeom>
+          <a:noFill/>
+        </p:spPr>
+        <p:txBody>
+          <a:bodyPr wrap="square">
+            <a:spAutoFit/>
+          </a:bodyPr>
+          <a:lstStyle/>
+          <a:p>
+            <a:pPr algn="l">
+              <a:defRPr sz="1500" b="1">
+                <a:solidFill>
+                  <a:srgbClr val="F0F4F8"/>
+                </a:solidFill>
+                <a:latin typeface="Meiryo"/>
+              </a:defRPr>
+            </a:pPr>
+            <a:r>
+              <a:t>データが陳腐化</a:t>
+            </a:r>
+          </a:p>
+        </p:txBody>
+      </p:sp>
+      <p:sp>
+        <p:nvSpPr>
+          <p:cNvPr id="19" name="TextBox 18"/>
+          <p:cNvSpPr txBox="1"/>
+          <p:nvPr/>
+        </p:nvSpPr>
+        <p:spPr>
+          <a:xfrm>
+            <a:off x="3474720" y="5074920"/>
+            <a:ext cx="2286000" cy="365760"/>
+          </a:xfrm>
+          <a:prstGeom prst="rect">
+            <a:avLst/>
+          </a:prstGeom>
+          <a:noFill/>
+        </p:spPr>
+        <p:txBody>
+          <a:bodyPr wrap="square">
+            <a:spAutoFit/>
+          </a:bodyPr>
+          <a:lstStyle/>
+          <a:p>
+            <a:pPr algn="l">
+              <a:defRPr sz="1300" b="0">
+                <a:solidFill>
+                  <a:srgbClr val="6B7280"/>
+                </a:solidFill>
+                <a:latin typeface="Meiryo"/>
+              </a:defRPr>
+            </a:pPr>
+            <a:r>
+              <a:t>更新もされず、投資が無駄に終わる</a:t>
+            </a:r>
+          </a:p>
+        </p:txBody>
+      </p:sp>
+      <p:sp>
+        <p:nvSpPr>
+          <p:cNvPr id="20" name="Rounded Rectangle 19"/>
+          <p:cNvSpPr/>
+          <p:nvPr/>
+        </p:nvSpPr>
+        <p:spPr>
+          <a:xfrm>
+            <a:off x="6309360" y="1828800"/>
+            <a:ext cx="5303520" cy="4114800"/>
+          </a:xfrm>
+          <a:prstGeom prst="roundRect">
+            <a:avLst>
+              <a:gd name="adj" fmla="val 4000"/>
+            </a:avLst>
+          </a:prstGeom>
+          <a:solidFill>
+            <a:srgbClr val="1A2E1A"/>
+          </a:solidFill>
+          <a:ln>
+            <a:noFill/>
+          </a:ln>
+        </p:spPr>
+        <p:style>
+          <a:lnRef idx="1">
+            <a:schemeClr val="accent1"/>
+          </a:lnRef>
+          <a:fillRef idx="3">
+            <a:schemeClr val="accent1"/>
+          </a:fillRef>
+          <a:effectRef idx="2">
+            <a:schemeClr val="accent1"/>
+          </a:effectRef>
+          <a:fontRef idx="minor">
+            <a:schemeClr val="lt1"/>
+          </a:fontRef>
+        </p:style>
+        <p:txBody>
+          <a:bodyPr rtlCol="0" anchor="ctr"/>
+          <a:lstStyle/>
+          <a:p>
+            <a:pPr algn="ctr"/>
+          </a:p>
+        </p:txBody>
+      </p:sp>
+      <p:sp>
+        <p:nvSpPr>
+          <p:cNvPr id="21" name="Rounded Rectangle 20"/>
+          <p:cNvSpPr/>
+          <p:nvPr/>
+        </p:nvSpPr>
+        <p:spPr>
+          <a:xfrm>
+            <a:off x="6309360" y="1828800"/>
+            <a:ext cx="5303520" cy="76200"/>
+          </a:xfrm>
+          <a:prstGeom prst="roundRect">
+            <a:avLst>
+              <a:gd name="adj" fmla="val 0"/>
+            </a:avLst>
+          </a:prstGeom>
+          <a:solidFill>
+            <a:srgbClr val="10B981"/>
+          </a:solidFill>
+          <a:ln>
+            <a:noFill/>
+          </a:ln>
+        </p:spPr>
+        <p:style>
+          <a:lnRef idx="1">
+            <a:schemeClr val="accent1"/>
+          </a:lnRef>
+          <a:fillRef idx="3">
+            <a:schemeClr val="accent1"/>
+          </a:fillRef>
+          <a:effectRef idx="2">
+            <a:schemeClr val="accent1"/>
+          </a:effectRef>
+          <a:fontRef idx="minor">
+            <a:schemeClr val="lt1"/>
+          </a:fontRef>
+        </p:style>
+        <p:txBody>
+          <a:bodyPr rtlCol="0" anchor="ctr"/>
+          <a:lstStyle/>
+          <a:p>
+            <a:pPr algn="ctr"/>
+          </a:p>
+        </p:txBody>
+      </p:sp>
+      <p:sp>
+        <p:nvSpPr>
+          <p:cNvPr id="22" name="TextBox 21"/>
+          <p:cNvSpPr txBox="1"/>
+          <p:nvPr/>
+        </p:nvSpPr>
+        <p:spPr>
+          <a:xfrm>
+            <a:off x="6675120" y="2103120"/>
+            <a:ext cx="4572000" cy="457200"/>
+          </a:xfrm>
+          <a:prstGeom prst="rect">
+            <a:avLst/>
+          </a:prstGeom>
+          <a:noFill/>
+        </p:spPr>
+        <p:txBody>
+          <a:bodyPr wrap="square">
+            <a:spAutoFit/>
+          </a:bodyPr>
+          <a:lstStyle/>
+          <a:p>
+            <a:pPr algn="l">
+              <a:defRPr sz="2400" b="1">
+                <a:solidFill>
+                  <a:srgbClr val="10B981"/>
+                </a:solidFill>
+                <a:latin typeface="Meiryo"/>
+              </a:defRPr>
+            </a:pPr>
+            <a:r>
+              <a:t>あるべき進め方</a:t>
+            </a:r>
+          </a:p>
+        </p:txBody>
+      </p:sp>
+      <p:sp>
+        <p:nvSpPr>
+          <p:cNvPr id="23" name="TextBox 22"/>
+          <p:cNvSpPr txBox="1"/>
+          <p:nvPr/>
+        </p:nvSpPr>
+        <p:spPr>
+          <a:xfrm>
+            <a:off x="6675120" y="2743200"/>
+            <a:ext cx="365760" cy="365760"/>
+          </a:xfrm>
+          <a:prstGeom prst="rect">
+            <a:avLst/>
+          </a:prstGeom>
+          <a:noFill/>
+        </p:spPr>
+        <p:txBody>
+          <a:bodyPr wrap="square">
+            <a:spAutoFit/>
+          </a:bodyPr>
+          <a:lstStyle/>
+          <a:p>
+            <a:pPr algn="l">
+              <a:defRPr sz="1600" b="1">
+                <a:solidFill>
+                  <a:srgbClr val="10B981"/>
+                </a:solidFill>
+                <a:latin typeface="Meiryo"/>
+              </a:defRPr>
+            </a:pPr>
+            <a:r>
+              <a:t>1</a:t>
+            </a:r>
+          </a:p>
+        </p:txBody>
+      </p:sp>
+      <p:sp>
+        <p:nvSpPr>
+          <p:cNvPr id="24" name="TextBox 23"/>
+          <p:cNvSpPr txBox="1"/>
+          <p:nvPr/>
+        </p:nvSpPr>
+        <p:spPr>
+          <a:xfrm>
+            <a:off x="7132320" y="2743200"/>
+            <a:ext cx="2011680" cy="548640"/>
+          </a:xfrm>
+          <a:prstGeom prst="rect">
+            <a:avLst/>
+          </a:prstGeom>
+          <a:noFill/>
+        </p:spPr>
+        <p:txBody>
+          <a:bodyPr wrap="square">
+            <a:spAutoFit/>
+          </a:bodyPr>
+          <a:lstStyle/>
+          <a:p>
+            <a:pPr algn="l">
+              <a:defRPr sz="1400" b="1">
+                <a:solidFill>
+                  <a:srgbClr val="F0F4F8"/>
+                </a:solidFill>
+                <a:latin typeface="Meiryo"/>
+              </a:defRPr>
+            </a:pPr>
+            <a:r>
+              <a:t>既存の定例会議に組み込む</a:t>
+            </a:r>
+          </a:p>
+        </p:txBody>
+      </p:sp>
+      <p:sp>
+        <p:nvSpPr>
+          <p:cNvPr id="25" name="TextBox 24"/>
+          <p:cNvSpPr txBox="1"/>
+          <p:nvPr/>
+        </p:nvSpPr>
+        <p:spPr>
+          <a:xfrm>
+            <a:off x="9235440" y="2743200"/>
+            <a:ext cx="2194560" cy="548640"/>
+          </a:xfrm>
+          <a:prstGeom prst="rect">
+            <a:avLst/>
+          </a:prstGeom>
+          <a:noFill/>
+        </p:spPr>
+        <p:txBody>
+          <a:bodyPr wrap="square">
+            <a:spAutoFit/>
+          </a:bodyPr>
+          <a:lstStyle/>
+          <a:p>
+            <a:pPr algn="l">
+              <a:defRPr sz="1200" b="0">
+                <a:solidFill>
+                  <a:srgbClr val="6B7280"/>
+                </a:solidFill>
+                <a:latin typeface="Meiryo"/>
+              </a:defRPr>
+            </a:pPr>
+            <a:r>
+              <a:t>取締役会・経営会議・部門定例に</a:t>
+            </a:r>
+            <a:br/>
+            <a:r>
+              <a:t>DX効果のレビュー枠を追加</a:t>
+            </a:r>
+          </a:p>
+        </p:txBody>
+      </p:sp>
+      <p:sp>
+        <p:nvSpPr>
+          <p:cNvPr id="26" name="TextBox 25"/>
+          <p:cNvSpPr txBox="1"/>
+          <p:nvPr/>
+        </p:nvSpPr>
+        <p:spPr>
+          <a:xfrm>
+            <a:off x="6675120" y="3520440"/>
+            <a:ext cx="365760" cy="365760"/>
+          </a:xfrm>
+          <a:prstGeom prst="rect">
+            <a:avLst/>
+          </a:prstGeom>
+          <a:noFill/>
+        </p:spPr>
+        <p:txBody>
+          <a:bodyPr wrap="square">
+            <a:spAutoFit/>
+          </a:bodyPr>
+          <a:lstStyle/>
+          <a:p>
+            <a:pPr algn="l">
+              <a:defRPr sz="1600" b="1">
+                <a:solidFill>
+                  <a:srgbClr val="10B981"/>
+                </a:solidFill>
+                <a:latin typeface="Meiryo"/>
+              </a:defRPr>
+            </a:pPr>
+            <a:r>
+              <a:t>2</a:t>
+            </a:r>
+          </a:p>
+        </p:txBody>
+      </p:sp>
+      <p:sp>
+        <p:nvSpPr>
+          <p:cNvPr id="27" name="TextBox 26"/>
+          <p:cNvSpPr txBox="1"/>
+          <p:nvPr/>
+        </p:nvSpPr>
+        <p:spPr>
+          <a:xfrm>
+            <a:off x="7132320" y="3520440"/>
+            <a:ext cx="2011680" cy="548640"/>
+          </a:xfrm>
+          <a:prstGeom prst="rect">
+            <a:avLst/>
+          </a:prstGeom>
+          <a:noFill/>
+        </p:spPr>
+        <p:txBody>
+          <a:bodyPr wrap="square">
+            <a:spAutoFit/>
+          </a:bodyPr>
+          <a:lstStyle/>
+          <a:p>
+            <a:pPr algn="l">
+              <a:defRPr sz="1400" b="1">
+                <a:solidFill>
+                  <a:srgbClr val="F0F4F8"/>
+                </a:solidFill>
+                <a:latin typeface="Meiryo"/>
+              </a:defRPr>
+            </a:pPr>
+            <a:r>
+              <a:t>議題として強制的に扱う</a:t>
+            </a:r>
+          </a:p>
+        </p:txBody>
+      </p:sp>
+      <p:sp>
+        <p:nvSpPr>
+          <p:cNvPr id="28" name="TextBox 27"/>
+          <p:cNvSpPr txBox="1"/>
+          <p:nvPr/>
+        </p:nvSpPr>
+        <p:spPr>
+          <a:xfrm>
+            <a:off x="9235440" y="3520440"/>
+            <a:ext cx="2194560" cy="548640"/>
+          </a:xfrm>
+          <a:prstGeom prst="rect">
+            <a:avLst/>
+          </a:prstGeom>
+          <a:noFill/>
+        </p:spPr>
+        <p:txBody>
+          <a:bodyPr wrap="square">
+            <a:spAutoFit/>
+          </a:bodyPr>
+          <a:lstStyle/>
+          <a:p>
+            <a:pPr algn="l">
+              <a:defRPr sz="1200" b="0">
+                <a:solidFill>
+                  <a:srgbClr val="6B7280"/>
+                </a:solidFill>
+                <a:latin typeface="Meiryo"/>
+              </a:defRPr>
+            </a:pPr>
+            <a:r>
+              <a:t>アジェンダに「DX効果報告」を</a:t>
+            </a:r>
+            <a:br/>
+            <a:r>
+              <a:t>固定枠として設定する</a:t>
+            </a:r>
+          </a:p>
+        </p:txBody>
+      </p:sp>
+      <p:sp>
+        <p:nvSpPr>
+          <p:cNvPr id="29" name="TextBox 28"/>
+          <p:cNvSpPr txBox="1"/>
+          <p:nvPr/>
+        </p:nvSpPr>
+        <p:spPr>
+          <a:xfrm>
+            <a:off x="6675120" y="4297680"/>
+            <a:ext cx="365760" cy="365760"/>
+          </a:xfrm>
+          <a:prstGeom prst="rect">
+            <a:avLst/>
+          </a:prstGeom>
+          <a:noFill/>
+        </p:spPr>
+        <p:txBody>
+          <a:bodyPr wrap="square">
+            <a:spAutoFit/>
+          </a:bodyPr>
+          <a:lstStyle/>
+          <a:p>
+            <a:pPr algn="l">
+              <a:defRPr sz="1600" b="1">
+                <a:solidFill>
+                  <a:srgbClr val="10B981"/>
+                </a:solidFill>
+                <a:latin typeface="Meiryo"/>
+              </a:defRPr>
+            </a:pPr>
+            <a:r>
+              <a:t>3</a:t>
+            </a:r>
+          </a:p>
+        </p:txBody>
+      </p:sp>
+      <p:sp>
+        <p:nvSpPr>
+          <p:cNvPr id="30" name="TextBox 29"/>
+          <p:cNvSpPr txBox="1"/>
+          <p:nvPr/>
+        </p:nvSpPr>
+        <p:spPr>
+          <a:xfrm>
+            <a:off x="7132320" y="4297680"/>
+            <a:ext cx="2011680" cy="548640"/>
+          </a:xfrm>
+          <a:prstGeom prst="rect">
+            <a:avLst/>
+          </a:prstGeom>
+          <a:noFill/>
+        </p:spPr>
+        <p:txBody>
+          <a:bodyPr wrap="square">
+            <a:spAutoFit/>
+          </a:bodyPr>
+          <a:lstStyle/>
+          <a:p>
+            <a:pPr algn="l">
+              <a:defRPr sz="1400" b="1">
+                <a:solidFill>
+                  <a:srgbClr val="F0F4F8"/>
+                </a:solidFill>
+                <a:latin typeface="Meiryo"/>
+              </a:defRPr>
+            </a:pPr>
+            <a:r>
+              <a:t>報告フォーマットを統一</a:t>
+            </a:r>
+          </a:p>
+        </p:txBody>
+      </p:sp>
+      <p:sp>
+        <p:nvSpPr>
+          <p:cNvPr id="31" name="TextBox 30"/>
+          <p:cNvSpPr txBox="1"/>
+          <p:nvPr/>
+        </p:nvSpPr>
+        <p:spPr>
+          <a:xfrm>
+            <a:off x="9235440" y="4297680"/>
+            <a:ext cx="2194560" cy="548640"/>
+          </a:xfrm>
+          <a:prstGeom prst="rect">
+            <a:avLst/>
+          </a:prstGeom>
+          <a:noFill/>
+        </p:spPr>
+        <p:txBody>
+          <a:bodyPr wrap="square">
+            <a:spAutoFit/>
+          </a:bodyPr>
+          <a:lstStyle/>
+          <a:p>
+            <a:pPr algn="l">
+              <a:defRPr sz="1200" b="0">
+                <a:solidFill>
+                  <a:srgbClr val="6B7280"/>
+                </a:solidFill>
+                <a:latin typeface="Meiryo"/>
+              </a:defRPr>
+            </a:pPr>
+            <a:r>
+              <a:t>売上・利益への影響を</a:t>
+            </a:r>
+            <a:br/>
+            <a:r>
+              <a:t>毎回同じ形式で報告する</a:t>
+            </a:r>
+          </a:p>
+        </p:txBody>
+      </p:sp>
+      <p:sp>
+        <p:nvSpPr>
+          <p:cNvPr id="32" name="TextBox 31"/>
+          <p:cNvSpPr txBox="1"/>
+          <p:nvPr/>
+        </p:nvSpPr>
+        <p:spPr>
+          <a:xfrm>
+            <a:off x="6675120" y="5074920"/>
+            <a:ext cx="365760" cy="365760"/>
+          </a:xfrm>
+          <a:prstGeom prst="rect">
+            <a:avLst/>
+          </a:prstGeom>
+          <a:noFill/>
+        </p:spPr>
+        <p:txBody>
+          <a:bodyPr wrap="square">
+            <a:spAutoFit/>
+          </a:bodyPr>
+          <a:lstStyle/>
+          <a:p>
+            <a:pPr algn="l">
+              <a:defRPr sz="1600" b="1">
+                <a:solidFill>
+                  <a:srgbClr val="10B981"/>
+                </a:solidFill>
+                <a:latin typeface="Meiryo"/>
+              </a:defRPr>
+            </a:pPr>
+            <a:r>
+              <a:t>4</a:t>
+            </a:r>
+          </a:p>
+        </p:txBody>
+      </p:sp>
+      <p:sp>
+        <p:nvSpPr>
+          <p:cNvPr id="33" name="TextBox 32"/>
+          <p:cNvSpPr txBox="1"/>
+          <p:nvPr/>
+        </p:nvSpPr>
+        <p:spPr>
+          <a:xfrm>
+            <a:off x="7132320" y="5074920"/>
+            <a:ext cx="2011680" cy="548640"/>
+          </a:xfrm>
+          <a:prstGeom prst="rect">
+            <a:avLst/>
+          </a:prstGeom>
+          <a:noFill/>
+        </p:spPr>
+        <p:txBody>
+          <a:bodyPr wrap="square">
+            <a:spAutoFit/>
+          </a:bodyPr>
+          <a:lstStyle/>
+          <a:p>
+            <a:pPr algn="l">
+              <a:defRPr sz="1400" b="1">
+                <a:solidFill>
+                  <a:srgbClr val="F0F4F8"/>
+                </a:solidFill>
+                <a:latin typeface="Meiryo"/>
+              </a:defRPr>
+            </a:pPr>
+            <a:r>
+              <a:t>意思決定と直結させる</a:t>
+            </a:r>
+          </a:p>
+        </p:txBody>
+      </p:sp>
+      <p:sp>
+        <p:nvSpPr>
+          <p:cNvPr id="34" name="TextBox 33"/>
+          <p:cNvSpPr txBox="1"/>
+          <p:nvPr/>
+        </p:nvSpPr>
+        <p:spPr>
+          <a:xfrm>
+            <a:off x="9235440" y="5074920"/>
+            <a:ext cx="2194560" cy="548640"/>
+          </a:xfrm>
+          <a:prstGeom prst="rect">
+            <a:avLst/>
+          </a:prstGeom>
+          <a:noFill/>
+        </p:spPr>
+        <p:txBody>
+          <a:bodyPr wrap="square">
+            <a:spAutoFit/>
+          </a:bodyPr>
+          <a:lstStyle/>
+          <a:p>
+            <a:pPr algn="l">
+              <a:defRPr sz="1200" b="0">
+                <a:solidFill>
+                  <a:srgbClr val="6B7280"/>
+                </a:solidFill>
+                <a:latin typeface="Meiryo"/>
+              </a:defRPr>
+            </a:pPr>
+            <a:r>
+              <a:t>数値が悪ければ改善策を決議、</a:t>
+            </a:r>
+            <a:br/>
+            <a:r>
+              <a:t>良ければ横展開を決定する</a:t>
+            </a:r>
+          </a:p>
+        </p:txBody>
+      </p:sp>
+      <p:sp>
+        <p:nvSpPr>
+          <p:cNvPr id="35" name="Rounded Rectangle 34"/>
+          <p:cNvSpPr/>
+          <p:nvPr/>
+        </p:nvSpPr>
+        <p:spPr>
+          <a:xfrm>
+            <a:off x="731520" y="6217920"/>
+            <a:ext cx="10698480" cy="457200"/>
+          </a:xfrm>
+          <a:prstGeom prst="roundRect">
+            <a:avLst>
+              <a:gd name="adj" fmla="val 3000"/>
+            </a:avLst>
+          </a:prstGeom>
+          <a:solidFill>
+            <a:srgbClr val="0A2A3E"/>
+          </a:solidFill>
+          <a:ln>
+            <a:noFill/>
+          </a:ln>
+        </p:spPr>
+        <p:style>
+          <a:lnRef idx="1">
+            <a:schemeClr val="accent1"/>
+          </a:lnRef>
+          <a:fillRef idx="3">
+            <a:schemeClr val="accent1"/>
+          </a:fillRef>
+          <a:effectRef idx="2">
+            <a:schemeClr val="accent1"/>
+          </a:effectRef>
+          <a:fontRef idx="minor">
+            <a:schemeClr val="lt1"/>
+          </a:fontRef>
+        </p:style>
+        <p:txBody>
+          <a:bodyPr rtlCol="0" anchor="ctr"/>
+          <a:lstStyle/>
+          <a:p>
+            <a:pPr algn="ctr"/>
+          </a:p>
+        </p:txBody>
+      </p:sp>
+      <p:sp>
+        <p:nvSpPr>
+          <p:cNvPr id="36" name="TextBox 35"/>
+          <p:cNvSpPr txBox="1"/>
+          <p:nvPr/>
+        </p:nvSpPr>
+        <p:spPr>
+          <a:xfrm>
+            <a:off x="1097280" y="6263640"/>
+            <a:ext cx="10058400" cy="365760"/>
+          </a:xfrm>
+          <a:prstGeom prst="rect">
+            <a:avLst/>
+          </a:prstGeom>
+          <a:noFill/>
+        </p:spPr>
+        <p:txBody>
+          <a:bodyPr wrap="square">
+            <a:spAutoFit/>
+          </a:bodyPr>
+          <a:lstStyle/>
+          <a:p>
+            <a:pPr algn="ctr">
+              <a:defRPr sz="1500" b="1">
+                <a:solidFill>
+                  <a:srgbClr val="48CAE4"/>
+                </a:solidFill>
+                <a:latin typeface="Meiryo"/>
+              </a:defRPr>
+            </a:pPr>
+            <a:r>
+              <a:t>体重計を買っても乗らない → パーソナルジムで毎週トレーナーに計測される → だから続く。DXも同じ。</a:t>
+            </a:r>
+          </a:p>
+        </p:txBody>
+      </p:sp>
+    </p:spTree>
+  </p:cSld>
+  <p:clrMapOvr>
+    <a:masterClrMapping/>
+  </p:clrMapOvr>
+</p:sld>
+</file>
+
+<file path=ppt/slides/slide9.xml><?xml version="1.0" encoding="utf-8"?>
 <p:sld xmlns:a="http://schemas.openxmlformats.org/drawingml/2006/main" xmlns:p="http://schemas.openxmlformats.org/presentationml/2006/main" xmlns:r="http://schemas.openxmlformats.org/officeDocument/2006/relationships">
   <p:cSld>
     <p:bg>
